--- a/icons/icon-vector.pptx
+++ b/icons/icon-vector.pptx
@@ -104,6 +104,11 @@
       </a:defRPr>
     </a:lvl9pPr>
   </p:defaultTextStyle>
+  <p:extLst>
+    <p:ext uri="{EFAFB233-063F-42B5-8137-9DF3F51BA10A}">
+      <p15:sldGuideLst xmlns:p15="http://schemas.microsoft.com/office/powerpoint/2012/main"/>
+    </p:ext>
+  </p:extLst>
 </p:presentation>
 </file>
 
@@ -238,7 +243,7 @@
           <a:p>
             <a:fld id="{9F7BCCA5-C510-409B-BE36-C79D543FD690}" type="datetimeFigureOut">
               <a:rPr lang="ko-KR" altLang="en-US" smtClean="0"/>
-              <a:t>2026-07-27</a:t>
+              <a:t>2026-07-28</a:t>
             </a:fld>
             <a:endParaRPr lang="ko-KR" altLang="en-US"/>
           </a:p>
@@ -408,7 +413,7 @@
           <a:p>
             <a:fld id="{9F7BCCA5-C510-409B-BE36-C79D543FD690}" type="datetimeFigureOut">
               <a:rPr lang="ko-KR" altLang="en-US" smtClean="0"/>
-              <a:t>2026-07-27</a:t>
+              <a:t>2026-07-28</a:t>
             </a:fld>
             <a:endParaRPr lang="ko-KR" altLang="en-US"/>
           </a:p>
@@ -588,7 +593,7 @@
           <a:p>
             <a:fld id="{9F7BCCA5-C510-409B-BE36-C79D543FD690}" type="datetimeFigureOut">
               <a:rPr lang="ko-KR" altLang="en-US" smtClean="0"/>
-              <a:t>2026-07-27</a:t>
+              <a:t>2026-07-28</a:t>
             </a:fld>
             <a:endParaRPr lang="ko-KR" altLang="en-US"/>
           </a:p>
@@ -758,7 +763,7 @@
           <a:p>
             <a:fld id="{9F7BCCA5-C510-409B-BE36-C79D543FD690}" type="datetimeFigureOut">
               <a:rPr lang="ko-KR" altLang="en-US" smtClean="0"/>
-              <a:t>2026-07-27</a:t>
+              <a:t>2026-07-28</a:t>
             </a:fld>
             <a:endParaRPr lang="ko-KR" altLang="en-US"/>
           </a:p>
@@ -1004,7 +1009,7 @@
           <a:p>
             <a:fld id="{9F7BCCA5-C510-409B-BE36-C79D543FD690}" type="datetimeFigureOut">
               <a:rPr lang="ko-KR" altLang="en-US" smtClean="0"/>
-              <a:t>2026-07-27</a:t>
+              <a:t>2026-07-28</a:t>
             </a:fld>
             <a:endParaRPr lang="ko-KR" altLang="en-US"/>
           </a:p>
@@ -1236,7 +1241,7 @@
           <a:p>
             <a:fld id="{9F7BCCA5-C510-409B-BE36-C79D543FD690}" type="datetimeFigureOut">
               <a:rPr lang="ko-KR" altLang="en-US" smtClean="0"/>
-              <a:t>2026-07-27</a:t>
+              <a:t>2026-07-28</a:t>
             </a:fld>
             <a:endParaRPr lang="ko-KR" altLang="en-US"/>
           </a:p>
@@ -1603,7 +1608,7 @@
           <a:p>
             <a:fld id="{9F7BCCA5-C510-409B-BE36-C79D543FD690}" type="datetimeFigureOut">
               <a:rPr lang="ko-KR" altLang="en-US" smtClean="0"/>
-              <a:t>2026-07-27</a:t>
+              <a:t>2026-07-28</a:t>
             </a:fld>
             <a:endParaRPr lang="ko-KR" altLang="en-US"/>
           </a:p>
@@ -1721,7 +1726,7 @@
           <a:p>
             <a:fld id="{9F7BCCA5-C510-409B-BE36-C79D543FD690}" type="datetimeFigureOut">
               <a:rPr lang="ko-KR" altLang="en-US" smtClean="0"/>
-              <a:t>2026-07-27</a:t>
+              <a:t>2026-07-28</a:t>
             </a:fld>
             <a:endParaRPr lang="ko-KR" altLang="en-US"/>
           </a:p>
@@ -1816,7 +1821,7 @@
           <a:p>
             <a:fld id="{9F7BCCA5-C510-409B-BE36-C79D543FD690}" type="datetimeFigureOut">
               <a:rPr lang="ko-KR" altLang="en-US" smtClean="0"/>
-              <a:t>2026-07-27</a:t>
+              <a:t>2026-07-28</a:t>
             </a:fld>
             <a:endParaRPr lang="ko-KR" altLang="en-US"/>
           </a:p>
@@ -2093,7 +2098,7 @@
           <a:p>
             <a:fld id="{9F7BCCA5-C510-409B-BE36-C79D543FD690}" type="datetimeFigureOut">
               <a:rPr lang="ko-KR" altLang="en-US" smtClean="0"/>
-              <a:t>2026-07-27</a:t>
+              <a:t>2026-07-28</a:t>
             </a:fld>
             <a:endParaRPr lang="ko-KR" altLang="en-US"/>
           </a:p>
@@ -2346,7 +2351,7 @@
           <a:p>
             <a:fld id="{9F7BCCA5-C510-409B-BE36-C79D543FD690}" type="datetimeFigureOut">
               <a:rPr lang="ko-KR" altLang="en-US" smtClean="0"/>
-              <a:t>2026-07-27</a:t>
+              <a:t>2026-07-28</a:t>
             </a:fld>
             <a:endParaRPr lang="ko-KR" altLang="en-US"/>
           </a:p>
@@ -2559,7 +2564,7 @@
           <a:p>
             <a:fld id="{9F7BCCA5-C510-409B-BE36-C79D543FD690}" type="datetimeFigureOut">
               <a:rPr lang="ko-KR" altLang="en-US" smtClean="0"/>
-              <a:t>2026-07-27</a:t>
+              <a:t>2026-07-28</a:t>
             </a:fld>
             <a:endParaRPr lang="ko-KR" altLang="en-US"/>
           </a:p>
@@ -2964,36 +2969,777 @@
           <a:chExt cx="0" cy="0"/>
         </a:xfrm>
       </p:grpSpPr>
+      <p:sp>
+        <p:nvSpPr>
+          <p:cNvPr id="5" name="모서리가 둥근 직사각형 4"/>
+          <p:cNvSpPr/>
+          <p:nvPr/>
+        </p:nvSpPr>
+        <p:spPr>
+          <a:xfrm>
+            <a:off x="3660503" y="1245873"/>
+            <a:ext cx="1828800" cy="1828800"/>
+          </a:xfrm>
+          <a:prstGeom prst="roundRect">
+            <a:avLst/>
+          </a:prstGeom>
+          <a:solidFill>
+            <a:srgbClr val="28764F"/>
+          </a:solidFill>
+          <a:ln>
+            <a:noFill/>
+          </a:ln>
+          <a:scene3d>
+            <a:camera prst="obliqueBottomRight"/>
+            <a:lightRig rig="threePt" dir="t">
+              <a:rot lat="0" lon="0" rev="10800000"/>
+            </a:lightRig>
+          </a:scene3d>
+          <a:sp3d extrusionH="762000" prstMaterial="matte">
+            <a:extrusionClr>
+              <a:srgbClr val="349E6C"/>
+            </a:extrusionClr>
+            <a:contourClr>
+              <a:schemeClr val="bg1"/>
+            </a:contourClr>
+          </a:sp3d>
+        </p:spPr>
+        <p:style>
+          <a:lnRef idx="2">
+            <a:schemeClr val="accent1">
+              <a:shade val="50000"/>
+            </a:schemeClr>
+          </a:lnRef>
+          <a:fillRef idx="1">
+            <a:schemeClr val="accent1"/>
+          </a:fillRef>
+          <a:effectRef idx="0">
+            <a:schemeClr val="accent1"/>
+          </a:effectRef>
+          <a:fontRef idx="minor">
+            <a:schemeClr val="lt1"/>
+          </a:fontRef>
+        </p:style>
+        <p:txBody>
+          <a:bodyPr rtlCol="0" anchor="ctr"/>
+          <a:lstStyle/>
+          <a:p>
+            <a:pPr algn="ctr"/>
+            <a:endParaRPr lang="ko-KR" altLang="en-US"/>
+          </a:p>
+        </p:txBody>
+      </p:sp>
+      <p:sp>
+        <p:nvSpPr>
+          <p:cNvPr id="199" name="자유형 198"/>
+          <p:cNvSpPr/>
+          <p:nvPr/>
+        </p:nvSpPr>
+        <p:spPr>
+          <a:xfrm>
+            <a:off x="3658703" y="2466273"/>
+            <a:ext cx="608400" cy="608400"/>
+          </a:xfrm>
+          <a:custGeom>
+            <a:avLst/>
+            <a:gdLst>
+              <a:gd name="connsiteX0" fmla="*/ 0 w 608400"/>
+              <a:gd name="connsiteY0" fmla="*/ 0 h 608400"/>
+              <a:gd name="connsiteX1" fmla="*/ 608400 w 608400"/>
+              <a:gd name="connsiteY1" fmla="*/ 0 h 608400"/>
+              <a:gd name="connsiteX2" fmla="*/ 608400 w 608400"/>
+              <a:gd name="connsiteY2" fmla="*/ 608400 h 608400"/>
+              <a:gd name="connsiteX3" fmla="*/ 304806 w 608400"/>
+              <a:gd name="connsiteY3" fmla="*/ 608400 h 608400"/>
+              <a:gd name="connsiteX4" fmla="*/ 0 w 608400"/>
+              <a:gd name="connsiteY4" fmla="*/ 303594 h 608400"/>
+            </a:gdLst>
+            <a:ahLst/>
+            <a:cxnLst>
+              <a:cxn ang="0">
+                <a:pos x="connsiteX0" y="connsiteY0"/>
+              </a:cxn>
+              <a:cxn ang="0">
+                <a:pos x="connsiteX1" y="connsiteY1"/>
+              </a:cxn>
+              <a:cxn ang="0">
+                <a:pos x="connsiteX2" y="connsiteY2"/>
+              </a:cxn>
+              <a:cxn ang="0">
+                <a:pos x="connsiteX3" y="connsiteY3"/>
+              </a:cxn>
+              <a:cxn ang="0">
+                <a:pos x="connsiteX4" y="connsiteY4"/>
+              </a:cxn>
+            </a:cxnLst>
+            <a:rect l="l" t="t" r="r" b="b"/>
+            <a:pathLst>
+              <a:path w="608400" h="608400">
+                <a:moveTo>
+                  <a:pt x="0" y="0"/>
+                </a:moveTo>
+                <a:lnTo>
+                  <a:pt x="608400" y="0"/>
+                </a:lnTo>
+                <a:lnTo>
+                  <a:pt x="608400" y="608400"/>
+                </a:lnTo>
+                <a:lnTo>
+                  <a:pt x="304806" y="608400"/>
+                </a:lnTo>
+                <a:cubicBezTo>
+                  <a:pt x="136466" y="608400"/>
+                  <a:pt x="0" y="471934"/>
+                  <a:pt x="0" y="303594"/>
+                </a:cubicBezTo>
+                <a:close/>
+              </a:path>
+            </a:pathLst>
+          </a:custGeom>
+          <a:solidFill>
+            <a:srgbClr val="52C28A"/>
+          </a:solidFill>
+          <a:ln>
+            <a:noFill/>
+          </a:ln>
+        </p:spPr>
+        <p:style>
+          <a:lnRef idx="2">
+            <a:schemeClr val="accent1">
+              <a:shade val="50000"/>
+            </a:schemeClr>
+          </a:lnRef>
+          <a:fillRef idx="1">
+            <a:schemeClr val="accent1"/>
+          </a:fillRef>
+          <a:effectRef idx="0">
+            <a:schemeClr val="accent1"/>
+          </a:effectRef>
+          <a:fontRef idx="minor">
+            <a:schemeClr val="lt1"/>
+          </a:fontRef>
+        </p:style>
+        <p:txBody>
+          <a:bodyPr rtlCol="0" anchor="ctr"/>
+          <a:lstStyle/>
+          <a:p>
+            <a:pPr algn="ctr"/>
+            <a:endParaRPr lang="ko-KR" altLang="en-US"/>
+          </a:p>
+        </p:txBody>
+      </p:sp>
+      <p:sp>
+        <p:nvSpPr>
+          <p:cNvPr id="200" name="자유형 199"/>
+          <p:cNvSpPr/>
+          <p:nvPr/>
+        </p:nvSpPr>
+        <p:spPr>
+          <a:xfrm flipH="1">
+            <a:off x="4880903" y="2466273"/>
+            <a:ext cx="608400" cy="608400"/>
+          </a:xfrm>
+          <a:custGeom>
+            <a:avLst/>
+            <a:gdLst>
+              <a:gd name="connsiteX0" fmla="*/ 0 w 608400"/>
+              <a:gd name="connsiteY0" fmla="*/ 0 h 608400"/>
+              <a:gd name="connsiteX1" fmla="*/ 608400 w 608400"/>
+              <a:gd name="connsiteY1" fmla="*/ 0 h 608400"/>
+              <a:gd name="connsiteX2" fmla="*/ 608400 w 608400"/>
+              <a:gd name="connsiteY2" fmla="*/ 608400 h 608400"/>
+              <a:gd name="connsiteX3" fmla="*/ 304806 w 608400"/>
+              <a:gd name="connsiteY3" fmla="*/ 608400 h 608400"/>
+              <a:gd name="connsiteX4" fmla="*/ 0 w 608400"/>
+              <a:gd name="connsiteY4" fmla="*/ 303594 h 608400"/>
+            </a:gdLst>
+            <a:ahLst/>
+            <a:cxnLst>
+              <a:cxn ang="0">
+                <a:pos x="connsiteX0" y="connsiteY0"/>
+              </a:cxn>
+              <a:cxn ang="0">
+                <a:pos x="connsiteX1" y="connsiteY1"/>
+              </a:cxn>
+              <a:cxn ang="0">
+                <a:pos x="connsiteX2" y="connsiteY2"/>
+              </a:cxn>
+              <a:cxn ang="0">
+                <a:pos x="connsiteX3" y="connsiteY3"/>
+              </a:cxn>
+              <a:cxn ang="0">
+                <a:pos x="connsiteX4" y="connsiteY4"/>
+              </a:cxn>
+            </a:cxnLst>
+            <a:rect l="l" t="t" r="r" b="b"/>
+            <a:pathLst>
+              <a:path w="608400" h="608400">
+                <a:moveTo>
+                  <a:pt x="0" y="0"/>
+                </a:moveTo>
+                <a:lnTo>
+                  <a:pt x="608400" y="0"/>
+                </a:lnTo>
+                <a:lnTo>
+                  <a:pt x="608400" y="608400"/>
+                </a:lnTo>
+                <a:lnTo>
+                  <a:pt x="304806" y="608400"/>
+                </a:lnTo>
+                <a:cubicBezTo>
+                  <a:pt x="136466" y="608400"/>
+                  <a:pt x="0" y="471934"/>
+                  <a:pt x="0" y="303594"/>
+                </a:cubicBezTo>
+                <a:close/>
+              </a:path>
+            </a:pathLst>
+          </a:custGeom>
+          <a:solidFill>
+            <a:srgbClr val="2B7D54"/>
+          </a:solidFill>
+          <a:ln>
+            <a:noFill/>
+          </a:ln>
+        </p:spPr>
+        <p:style>
+          <a:lnRef idx="2">
+            <a:schemeClr val="accent1">
+              <a:shade val="50000"/>
+            </a:schemeClr>
+          </a:lnRef>
+          <a:fillRef idx="1">
+            <a:schemeClr val="accent1"/>
+          </a:fillRef>
+          <a:effectRef idx="0">
+            <a:schemeClr val="accent1"/>
+          </a:effectRef>
+          <a:fontRef idx="minor">
+            <a:schemeClr val="lt1"/>
+          </a:fontRef>
+        </p:style>
+        <p:txBody>
+          <a:bodyPr rtlCol="0" anchor="ctr"/>
+          <a:lstStyle/>
+          <a:p>
+            <a:pPr algn="ctr"/>
+            <a:endParaRPr lang="ko-KR" altLang="en-US"/>
+          </a:p>
+        </p:txBody>
+      </p:sp>
+      <p:sp>
+        <p:nvSpPr>
+          <p:cNvPr id="201" name="자유형 200"/>
+          <p:cNvSpPr/>
+          <p:nvPr/>
+        </p:nvSpPr>
+        <p:spPr>
+          <a:xfrm flipV="1">
+            <a:off x="3658703" y="1245873"/>
+            <a:ext cx="608400" cy="608400"/>
+          </a:xfrm>
+          <a:custGeom>
+            <a:avLst/>
+            <a:gdLst>
+              <a:gd name="connsiteX0" fmla="*/ 0 w 608400"/>
+              <a:gd name="connsiteY0" fmla="*/ 0 h 608400"/>
+              <a:gd name="connsiteX1" fmla="*/ 608400 w 608400"/>
+              <a:gd name="connsiteY1" fmla="*/ 0 h 608400"/>
+              <a:gd name="connsiteX2" fmla="*/ 608400 w 608400"/>
+              <a:gd name="connsiteY2" fmla="*/ 608400 h 608400"/>
+              <a:gd name="connsiteX3" fmla="*/ 304806 w 608400"/>
+              <a:gd name="connsiteY3" fmla="*/ 608400 h 608400"/>
+              <a:gd name="connsiteX4" fmla="*/ 0 w 608400"/>
+              <a:gd name="connsiteY4" fmla="*/ 303594 h 608400"/>
+            </a:gdLst>
+            <a:ahLst/>
+            <a:cxnLst>
+              <a:cxn ang="0">
+                <a:pos x="connsiteX0" y="connsiteY0"/>
+              </a:cxn>
+              <a:cxn ang="0">
+                <a:pos x="connsiteX1" y="connsiteY1"/>
+              </a:cxn>
+              <a:cxn ang="0">
+                <a:pos x="connsiteX2" y="connsiteY2"/>
+              </a:cxn>
+              <a:cxn ang="0">
+                <a:pos x="connsiteX3" y="connsiteY3"/>
+              </a:cxn>
+              <a:cxn ang="0">
+                <a:pos x="connsiteX4" y="connsiteY4"/>
+              </a:cxn>
+            </a:cxnLst>
+            <a:rect l="l" t="t" r="r" b="b"/>
+            <a:pathLst>
+              <a:path w="608400" h="608400">
+                <a:moveTo>
+                  <a:pt x="0" y="0"/>
+                </a:moveTo>
+                <a:lnTo>
+                  <a:pt x="608400" y="0"/>
+                </a:lnTo>
+                <a:lnTo>
+                  <a:pt x="608400" y="608400"/>
+                </a:lnTo>
+                <a:lnTo>
+                  <a:pt x="304806" y="608400"/>
+                </a:lnTo>
+                <a:cubicBezTo>
+                  <a:pt x="136466" y="608400"/>
+                  <a:pt x="0" y="471934"/>
+                  <a:pt x="0" y="303594"/>
+                </a:cubicBezTo>
+                <a:close/>
+              </a:path>
+            </a:pathLst>
+          </a:custGeom>
+          <a:solidFill>
+            <a:srgbClr val="2B7D54"/>
+          </a:solidFill>
+          <a:ln>
+            <a:noFill/>
+          </a:ln>
+        </p:spPr>
+        <p:style>
+          <a:lnRef idx="2">
+            <a:schemeClr val="accent1">
+              <a:shade val="50000"/>
+            </a:schemeClr>
+          </a:lnRef>
+          <a:fillRef idx="1">
+            <a:schemeClr val="accent1"/>
+          </a:fillRef>
+          <a:effectRef idx="0">
+            <a:schemeClr val="accent1"/>
+          </a:effectRef>
+          <a:fontRef idx="minor">
+            <a:schemeClr val="lt1"/>
+          </a:fontRef>
+        </p:style>
+        <p:txBody>
+          <a:bodyPr rtlCol="0" anchor="ctr"/>
+          <a:lstStyle/>
+          <a:p>
+            <a:pPr algn="ctr"/>
+            <a:endParaRPr lang="ko-KR" altLang="en-US"/>
+          </a:p>
+        </p:txBody>
+      </p:sp>
+      <p:sp>
+        <p:nvSpPr>
+          <p:cNvPr id="202" name="자유형 201"/>
+          <p:cNvSpPr/>
+          <p:nvPr/>
+        </p:nvSpPr>
+        <p:spPr>
+          <a:xfrm flipH="1" flipV="1">
+            <a:off x="4880903" y="1245873"/>
+            <a:ext cx="608400" cy="608400"/>
+          </a:xfrm>
+          <a:custGeom>
+            <a:avLst/>
+            <a:gdLst>
+              <a:gd name="connsiteX0" fmla="*/ 0 w 608400"/>
+              <a:gd name="connsiteY0" fmla="*/ 0 h 608400"/>
+              <a:gd name="connsiteX1" fmla="*/ 608400 w 608400"/>
+              <a:gd name="connsiteY1" fmla="*/ 0 h 608400"/>
+              <a:gd name="connsiteX2" fmla="*/ 608400 w 608400"/>
+              <a:gd name="connsiteY2" fmla="*/ 608400 h 608400"/>
+              <a:gd name="connsiteX3" fmla="*/ 304806 w 608400"/>
+              <a:gd name="connsiteY3" fmla="*/ 608400 h 608400"/>
+              <a:gd name="connsiteX4" fmla="*/ 0 w 608400"/>
+              <a:gd name="connsiteY4" fmla="*/ 303594 h 608400"/>
+            </a:gdLst>
+            <a:ahLst/>
+            <a:cxnLst>
+              <a:cxn ang="0">
+                <a:pos x="connsiteX0" y="connsiteY0"/>
+              </a:cxn>
+              <a:cxn ang="0">
+                <a:pos x="connsiteX1" y="connsiteY1"/>
+              </a:cxn>
+              <a:cxn ang="0">
+                <a:pos x="connsiteX2" y="connsiteY2"/>
+              </a:cxn>
+              <a:cxn ang="0">
+                <a:pos x="connsiteX3" y="connsiteY3"/>
+              </a:cxn>
+              <a:cxn ang="0">
+                <a:pos x="connsiteX4" y="connsiteY4"/>
+              </a:cxn>
+            </a:cxnLst>
+            <a:rect l="l" t="t" r="r" b="b"/>
+            <a:pathLst>
+              <a:path w="608400" h="608400">
+                <a:moveTo>
+                  <a:pt x="0" y="0"/>
+                </a:moveTo>
+                <a:lnTo>
+                  <a:pt x="608400" y="0"/>
+                </a:lnTo>
+                <a:lnTo>
+                  <a:pt x="608400" y="608400"/>
+                </a:lnTo>
+                <a:lnTo>
+                  <a:pt x="304806" y="608400"/>
+                </a:lnTo>
+                <a:cubicBezTo>
+                  <a:pt x="136466" y="608400"/>
+                  <a:pt x="0" y="471934"/>
+                  <a:pt x="0" y="303594"/>
+                </a:cubicBezTo>
+                <a:close/>
+              </a:path>
+            </a:pathLst>
+          </a:custGeom>
+          <a:solidFill>
+            <a:srgbClr val="52C28A"/>
+          </a:solidFill>
+          <a:ln>
+            <a:noFill/>
+          </a:ln>
+        </p:spPr>
+        <p:style>
+          <a:lnRef idx="2">
+            <a:schemeClr val="accent1">
+              <a:shade val="50000"/>
+            </a:schemeClr>
+          </a:lnRef>
+          <a:fillRef idx="1">
+            <a:schemeClr val="accent1"/>
+          </a:fillRef>
+          <a:effectRef idx="0">
+            <a:schemeClr val="accent1"/>
+          </a:effectRef>
+          <a:fontRef idx="minor">
+            <a:schemeClr val="lt1"/>
+          </a:fontRef>
+        </p:style>
+        <p:txBody>
+          <a:bodyPr rtlCol="0" anchor="ctr"/>
+          <a:lstStyle/>
+          <a:p>
+            <a:pPr algn="ctr"/>
+            <a:endParaRPr lang="ko-KR" altLang="en-US"/>
+          </a:p>
+        </p:txBody>
+      </p:sp>
+      <p:sp>
+        <p:nvSpPr>
+          <p:cNvPr id="203" name="직사각형 202"/>
+          <p:cNvSpPr/>
+          <p:nvPr/>
+        </p:nvSpPr>
+        <p:spPr>
+          <a:xfrm>
+            <a:off x="4880903" y="1854273"/>
+            <a:ext cx="608400" cy="612000"/>
+          </a:xfrm>
+          <a:prstGeom prst="rect">
+            <a:avLst/>
+          </a:prstGeom>
+          <a:solidFill>
+            <a:srgbClr val="369A68"/>
+          </a:solidFill>
+          <a:ln>
+            <a:noFill/>
+          </a:ln>
+        </p:spPr>
+        <p:style>
+          <a:lnRef idx="2">
+            <a:schemeClr val="accent1">
+              <a:shade val="50000"/>
+            </a:schemeClr>
+          </a:lnRef>
+          <a:fillRef idx="1">
+            <a:schemeClr val="accent1"/>
+          </a:fillRef>
+          <a:effectRef idx="0">
+            <a:schemeClr val="accent1"/>
+          </a:effectRef>
+          <a:fontRef idx="minor">
+            <a:schemeClr val="lt1"/>
+          </a:fontRef>
+        </p:style>
+        <p:txBody>
+          <a:bodyPr rtlCol="0" anchor="ctr"/>
+          <a:lstStyle/>
+          <a:p>
+            <a:pPr algn="ctr"/>
+            <a:endParaRPr lang="ko-KR" altLang="en-US"/>
+          </a:p>
+        </p:txBody>
+      </p:sp>
+      <p:sp>
+        <p:nvSpPr>
+          <p:cNvPr id="204" name="직사각형 203"/>
+          <p:cNvSpPr/>
+          <p:nvPr/>
+        </p:nvSpPr>
+        <p:spPr>
+          <a:xfrm>
+            <a:off x="3658703" y="1854273"/>
+            <a:ext cx="608400" cy="612000"/>
+          </a:xfrm>
+          <a:prstGeom prst="rect">
+            <a:avLst/>
+          </a:prstGeom>
+          <a:solidFill>
+            <a:srgbClr val="369A68"/>
+          </a:solidFill>
+          <a:ln>
+            <a:noFill/>
+          </a:ln>
+        </p:spPr>
+        <p:style>
+          <a:lnRef idx="2">
+            <a:schemeClr val="accent1">
+              <a:shade val="50000"/>
+            </a:schemeClr>
+          </a:lnRef>
+          <a:fillRef idx="1">
+            <a:schemeClr val="accent1"/>
+          </a:fillRef>
+          <a:effectRef idx="0">
+            <a:schemeClr val="accent1"/>
+          </a:effectRef>
+          <a:fontRef idx="minor">
+            <a:schemeClr val="lt1"/>
+          </a:fontRef>
+        </p:style>
+        <p:txBody>
+          <a:bodyPr rtlCol="0" anchor="ctr"/>
+          <a:lstStyle/>
+          <a:p>
+            <a:pPr algn="ctr"/>
+            <a:endParaRPr lang="ko-KR" altLang="en-US"/>
+          </a:p>
+        </p:txBody>
+      </p:sp>
+      <p:sp>
+        <p:nvSpPr>
+          <p:cNvPr id="205" name="직사각형 204"/>
+          <p:cNvSpPr/>
+          <p:nvPr/>
+        </p:nvSpPr>
+        <p:spPr>
+          <a:xfrm>
+            <a:off x="4268903" y="1854273"/>
+            <a:ext cx="612000" cy="612000"/>
+          </a:xfrm>
+          <a:prstGeom prst="rect">
+            <a:avLst/>
+          </a:prstGeom>
+          <a:solidFill>
+            <a:srgbClr val="AFE3C9"/>
+          </a:solidFill>
+          <a:ln>
+            <a:noFill/>
+          </a:ln>
+        </p:spPr>
+        <p:style>
+          <a:lnRef idx="2">
+            <a:schemeClr val="accent1">
+              <a:shade val="50000"/>
+            </a:schemeClr>
+          </a:lnRef>
+          <a:fillRef idx="1">
+            <a:schemeClr val="accent1"/>
+          </a:fillRef>
+          <a:effectRef idx="0">
+            <a:schemeClr val="accent1"/>
+          </a:effectRef>
+          <a:fontRef idx="minor">
+            <a:schemeClr val="lt1"/>
+          </a:fontRef>
+        </p:style>
+        <p:txBody>
+          <a:bodyPr rtlCol="0" anchor="ctr"/>
+          <a:lstStyle/>
+          <a:p>
+            <a:pPr algn="ctr"/>
+            <a:endParaRPr lang="ko-KR" altLang="en-US"/>
+          </a:p>
+        </p:txBody>
+      </p:sp>
+      <p:sp>
+        <p:nvSpPr>
+          <p:cNvPr id="206" name="직사각형 205"/>
+          <p:cNvSpPr/>
+          <p:nvPr/>
+        </p:nvSpPr>
+        <p:spPr>
+          <a:xfrm>
+            <a:off x="4268903" y="1245873"/>
+            <a:ext cx="612000" cy="608400"/>
+          </a:xfrm>
+          <a:prstGeom prst="rect">
+            <a:avLst/>
+          </a:prstGeom>
+          <a:solidFill>
+            <a:srgbClr val="369A68"/>
+          </a:solidFill>
+          <a:ln>
+            <a:noFill/>
+          </a:ln>
+        </p:spPr>
+        <p:style>
+          <a:lnRef idx="2">
+            <a:schemeClr val="accent1">
+              <a:shade val="50000"/>
+            </a:schemeClr>
+          </a:lnRef>
+          <a:fillRef idx="1">
+            <a:schemeClr val="accent1"/>
+          </a:fillRef>
+          <a:effectRef idx="0">
+            <a:schemeClr val="accent1"/>
+          </a:effectRef>
+          <a:fontRef idx="minor">
+            <a:schemeClr val="lt1"/>
+          </a:fontRef>
+        </p:style>
+        <p:txBody>
+          <a:bodyPr rtlCol="0" anchor="ctr"/>
+          <a:lstStyle/>
+          <a:p>
+            <a:pPr algn="ctr"/>
+            <a:endParaRPr lang="ko-KR" altLang="en-US"/>
+          </a:p>
+        </p:txBody>
+      </p:sp>
+      <p:sp>
+        <p:nvSpPr>
+          <p:cNvPr id="207" name="직사각형 206"/>
+          <p:cNvSpPr/>
+          <p:nvPr/>
+        </p:nvSpPr>
+        <p:spPr>
+          <a:xfrm>
+            <a:off x="4268903" y="2466273"/>
+            <a:ext cx="612000" cy="608400"/>
+          </a:xfrm>
+          <a:prstGeom prst="rect">
+            <a:avLst/>
+          </a:prstGeom>
+          <a:solidFill>
+            <a:srgbClr val="369A68"/>
+          </a:solidFill>
+          <a:ln>
+            <a:noFill/>
+          </a:ln>
+        </p:spPr>
+        <p:style>
+          <a:lnRef idx="2">
+            <a:schemeClr val="accent1">
+              <a:shade val="50000"/>
+            </a:schemeClr>
+          </a:lnRef>
+          <a:fillRef idx="1">
+            <a:schemeClr val="accent1"/>
+          </a:fillRef>
+          <a:effectRef idx="0">
+            <a:schemeClr val="accent1"/>
+          </a:effectRef>
+          <a:fontRef idx="minor">
+            <a:schemeClr val="lt1"/>
+          </a:fontRef>
+        </p:style>
+        <p:txBody>
+          <a:bodyPr rtlCol="0" anchor="ctr"/>
+          <a:lstStyle/>
+          <a:p>
+            <a:pPr algn="ctr"/>
+            <a:endParaRPr lang="ko-KR" altLang="en-US"/>
+          </a:p>
+        </p:txBody>
+      </p:sp>
       <p:grpSp>
         <p:nvGrpSpPr>
-          <p:cNvPr id="22" name="그룹 21"/>
+          <p:cNvPr id="6" name="그룹 5"/>
           <p:cNvGrpSpPr/>
           <p:nvPr/>
         </p:nvGrpSpPr>
         <p:grpSpPr>
           <a:xfrm>
-            <a:off x="1800458" y="749300"/>
-            <a:ext cx="1828800" cy="1828800"/>
-            <a:chOff x="1800458" y="749300"/>
-            <a:chExt cx="1828800" cy="1828800"/>
+            <a:off x="7036903" y="1334773"/>
+            <a:ext cx="1830600" cy="1828800"/>
+            <a:chOff x="7036903" y="1334773"/>
+            <a:chExt cx="1830600" cy="1828800"/>
           </a:xfrm>
         </p:grpSpPr>
         <p:sp>
           <p:nvSpPr>
-            <p:cNvPr id="12" name="모서리가 둥근 직사각형 11"/>
-            <p:cNvSpPr/>
+            <p:cNvPr id="218" name="자유형 217"/>
+            <p:cNvSpPr>
+              <a:spLocks noChangeAspect="1"/>
+            </p:cNvSpPr>
             <p:nvPr/>
           </p:nvSpPr>
           <p:spPr>
             <a:xfrm>
-              <a:off x="1800458" y="749300"/>
-              <a:ext cx="1828800" cy="1828800"/>
+              <a:off x="7036903" y="2555173"/>
+              <a:ext cx="608400" cy="608400"/>
             </a:xfrm>
-            <a:prstGeom prst="roundRect">
+            <a:custGeom>
               <a:avLst/>
-            </a:prstGeom>
+              <a:gdLst>
+                <a:gd name="connsiteX0" fmla="*/ 0 w 608400"/>
+                <a:gd name="connsiteY0" fmla="*/ 0 h 608400"/>
+                <a:gd name="connsiteX1" fmla="*/ 608400 w 608400"/>
+                <a:gd name="connsiteY1" fmla="*/ 0 h 608400"/>
+                <a:gd name="connsiteX2" fmla="*/ 608400 w 608400"/>
+                <a:gd name="connsiteY2" fmla="*/ 608400 h 608400"/>
+                <a:gd name="connsiteX3" fmla="*/ 304806 w 608400"/>
+                <a:gd name="connsiteY3" fmla="*/ 608400 h 608400"/>
+                <a:gd name="connsiteX4" fmla="*/ 0 w 608400"/>
+                <a:gd name="connsiteY4" fmla="*/ 303594 h 608400"/>
+              </a:gdLst>
+              <a:ahLst/>
+              <a:cxnLst>
+                <a:cxn ang="0">
+                  <a:pos x="connsiteX0" y="connsiteY0"/>
+                </a:cxn>
+                <a:cxn ang="0">
+                  <a:pos x="connsiteX1" y="connsiteY1"/>
+                </a:cxn>
+                <a:cxn ang="0">
+                  <a:pos x="connsiteX2" y="connsiteY2"/>
+                </a:cxn>
+                <a:cxn ang="0">
+                  <a:pos x="connsiteX3" y="connsiteY3"/>
+                </a:cxn>
+                <a:cxn ang="0">
+                  <a:pos x="connsiteX4" y="connsiteY4"/>
+                </a:cxn>
+              </a:cxnLst>
+              <a:rect l="l" t="t" r="r" b="b"/>
+              <a:pathLst>
+                <a:path w="608400" h="608400">
+                  <a:moveTo>
+                    <a:pt x="0" y="0"/>
+                  </a:moveTo>
+                  <a:lnTo>
+                    <a:pt x="608400" y="0"/>
+                  </a:lnTo>
+                  <a:lnTo>
+                    <a:pt x="608400" y="608400"/>
+                  </a:lnTo>
+                  <a:lnTo>
+                    <a:pt x="304806" y="608400"/>
+                  </a:lnTo>
+                  <a:cubicBezTo>
+                    <a:pt x="136466" y="608400"/>
+                    <a:pt x="0" y="471934"/>
+                    <a:pt x="0" y="303594"/>
+                  </a:cubicBezTo>
+                  <a:close/>
+                </a:path>
+              </a:pathLst>
+            </a:custGeom>
             <a:solidFill>
-              <a:srgbClr val="CDEFDB"/>
+              <a:srgbClr val="52C28A"/>
             </a:solidFill>
             <a:ln>
               <a:noFill/>
@@ -3026,142 +3772,75 @@
         </p:sp>
         <p:sp>
           <p:nvSpPr>
-            <p:cNvPr id="18" name="구름 17"/>
-            <p:cNvSpPr/>
+            <p:cNvPr id="219" name="자유형 218"/>
+            <p:cNvSpPr>
+              <a:spLocks noChangeAspect="1"/>
+            </p:cNvSpPr>
             <p:nvPr/>
           </p:nvSpPr>
           <p:spPr>
-            <a:xfrm>
-              <a:off x="1819508" y="768350"/>
-              <a:ext cx="1790700" cy="1790700"/>
+            <a:xfrm flipH="1">
+              <a:off x="8259103" y="2555173"/>
+              <a:ext cx="608400" cy="608400"/>
             </a:xfrm>
-            <a:prstGeom prst="cloud">
+            <a:custGeom>
               <a:avLst/>
-            </a:prstGeom>
-            <a:gradFill flip="none" rotWithShape="1">
-              <a:gsLst>
-                <a:gs pos="0">
-                  <a:srgbClr val="77CFA3"/>
-                </a:gs>
-                <a:gs pos="74000">
-                  <a:srgbClr val="B4EEBE"/>
-                </a:gs>
-                <a:gs pos="83000">
-                  <a:srgbClr val="B3EFB3"/>
-                </a:gs>
-                <a:gs pos="100000">
-                  <a:srgbClr val="379E6B"/>
-                </a:gs>
-              </a:gsLst>
-              <a:lin ang="2700000" scaled="1"/>
-              <a:tileRect/>
-            </a:gradFill>
-            <a:ln>
-              <a:solidFill>
-                <a:srgbClr val="99CB7B"/>
-              </a:solidFill>
-            </a:ln>
-          </p:spPr>
-          <p:style>
-            <a:lnRef idx="2">
-              <a:schemeClr val="accent1">
-                <a:shade val="50000"/>
-              </a:schemeClr>
-            </a:lnRef>
-            <a:fillRef idx="1">
-              <a:schemeClr val="accent1"/>
-            </a:fillRef>
-            <a:effectRef idx="0">
-              <a:schemeClr val="accent1"/>
-            </a:effectRef>
-            <a:fontRef idx="minor">
-              <a:schemeClr val="lt1"/>
-            </a:fontRef>
-          </p:style>
-          <p:txBody>
-            <a:bodyPr rtlCol="0" anchor="ctr"/>
-            <a:lstStyle/>
-            <a:p>
-              <a:pPr algn="ctr"/>
-              <a:endParaRPr lang="ko-KR" altLang="en-US"/>
-            </a:p>
-          </p:txBody>
-        </p:sp>
-        <p:sp>
-          <p:nvSpPr>
-            <p:cNvPr id="8" name="TextBox 7"/>
-            <p:cNvSpPr txBox="1"/>
-            <p:nvPr/>
-          </p:nvSpPr>
-          <p:spPr>
-            <a:xfrm>
-              <a:off x="2190983" y="771148"/>
-              <a:ext cx="1047750" cy="1785104"/>
-            </a:xfrm>
-            <a:prstGeom prst="rect">
-              <a:avLst/>
-            </a:prstGeom>
-            <a:noFill/>
-          </p:spPr>
-          <p:txBody>
-            <a:bodyPr wrap="square" rtlCol="0">
-              <a:spAutoFit/>
-            </a:bodyPr>
-            <a:lstStyle/>
-            <a:p>
-              <a:pPr algn="ctr"/>
-              <a:r>
-                <a:rPr lang="en-US" altLang="ko-KR" sz="10600" b="1" smtClean="0">
-                  <a:solidFill>
-                    <a:srgbClr val="379E6B"/>
-                  </a:solidFill>
-                  <a:latin typeface="Segoe UI" panose="020B0502040204020203" pitchFamily="34" charset="0"/>
-                  <a:ea typeface="Segoe UI Black" panose="020B0A02040204020203" pitchFamily="34" charset="0"/>
-                  <a:cs typeface="Segoe UI" panose="020B0502040204020203" pitchFamily="34" charset="0"/>
-                </a:rPr>
-                <a:t>M</a:t>
-              </a:r>
-              <a:endParaRPr lang="ko-KR" altLang="en-US" sz="10600" b="1">
-                <a:solidFill>
-                  <a:srgbClr val="379E6B"/>
-                </a:solidFill>
-                <a:latin typeface="Segoe UI" panose="020B0502040204020203" pitchFamily="34" charset="0"/>
-                <a:cs typeface="Segoe UI" panose="020B0502040204020203" pitchFamily="34" charset="0"/>
-              </a:endParaRPr>
-            </a:p>
-          </p:txBody>
-        </p:sp>
-      </p:grpSp>
-      <p:grpSp>
-        <p:nvGrpSpPr>
-          <p:cNvPr id="27" name="그룹 26"/>
-          <p:cNvGrpSpPr/>
-          <p:nvPr/>
-        </p:nvGrpSpPr>
-        <p:grpSpPr>
-          <a:xfrm>
-            <a:off x="5054600" y="749300"/>
-            <a:ext cx="4876800" cy="4876800"/>
-            <a:chOff x="3657600" y="727452"/>
-            <a:chExt cx="4876800" cy="4876800"/>
-          </a:xfrm>
-        </p:grpSpPr>
-        <p:sp>
-          <p:nvSpPr>
-            <p:cNvPr id="24" name="모서리가 둥근 직사각형 23"/>
-            <p:cNvSpPr/>
-            <p:nvPr/>
-          </p:nvSpPr>
-          <p:spPr>
-            <a:xfrm>
-              <a:off x="3657600" y="727452"/>
-              <a:ext cx="4876800" cy="4876800"/>
-            </a:xfrm>
-            <a:prstGeom prst="roundRect">
-              <a:avLst/>
-            </a:prstGeom>
+              <a:gdLst>
+                <a:gd name="connsiteX0" fmla="*/ 0 w 608400"/>
+                <a:gd name="connsiteY0" fmla="*/ 0 h 608400"/>
+                <a:gd name="connsiteX1" fmla="*/ 608400 w 608400"/>
+                <a:gd name="connsiteY1" fmla="*/ 0 h 608400"/>
+                <a:gd name="connsiteX2" fmla="*/ 608400 w 608400"/>
+                <a:gd name="connsiteY2" fmla="*/ 608400 h 608400"/>
+                <a:gd name="connsiteX3" fmla="*/ 304806 w 608400"/>
+                <a:gd name="connsiteY3" fmla="*/ 608400 h 608400"/>
+                <a:gd name="connsiteX4" fmla="*/ 0 w 608400"/>
+                <a:gd name="connsiteY4" fmla="*/ 303594 h 608400"/>
+              </a:gdLst>
+              <a:ahLst/>
+              <a:cxnLst>
+                <a:cxn ang="0">
+                  <a:pos x="connsiteX0" y="connsiteY0"/>
+                </a:cxn>
+                <a:cxn ang="0">
+                  <a:pos x="connsiteX1" y="connsiteY1"/>
+                </a:cxn>
+                <a:cxn ang="0">
+                  <a:pos x="connsiteX2" y="connsiteY2"/>
+                </a:cxn>
+                <a:cxn ang="0">
+                  <a:pos x="connsiteX3" y="connsiteY3"/>
+                </a:cxn>
+                <a:cxn ang="0">
+                  <a:pos x="connsiteX4" y="connsiteY4"/>
+                </a:cxn>
+              </a:cxnLst>
+              <a:rect l="l" t="t" r="r" b="b"/>
+              <a:pathLst>
+                <a:path w="608400" h="608400">
+                  <a:moveTo>
+                    <a:pt x="0" y="0"/>
+                  </a:moveTo>
+                  <a:lnTo>
+                    <a:pt x="608400" y="0"/>
+                  </a:lnTo>
+                  <a:lnTo>
+                    <a:pt x="608400" y="608400"/>
+                  </a:lnTo>
+                  <a:lnTo>
+                    <a:pt x="304806" y="608400"/>
+                  </a:lnTo>
+                  <a:cubicBezTo>
+                    <a:pt x="136466" y="608400"/>
+                    <a:pt x="0" y="471934"/>
+                    <a:pt x="0" y="303594"/>
+                  </a:cubicBezTo>
+                  <a:close/>
+                </a:path>
+              </a:pathLst>
+            </a:custGeom>
             <a:solidFill>
-              <a:srgbClr val="CDEFDB"/>
+              <a:srgbClr val="2B7D54"/>
             </a:solidFill>
             <a:ln>
               <a:noFill/>
@@ -3194,40 +3873,78 @@
         </p:sp>
         <p:sp>
           <p:nvSpPr>
-            <p:cNvPr id="25" name="구름 24"/>
-            <p:cNvSpPr/>
+            <p:cNvPr id="220" name="자유형 219"/>
+            <p:cNvSpPr>
+              <a:spLocks noChangeAspect="1"/>
+            </p:cNvSpPr>
             <p:nvPr/>
           </p:nvSpPr>
           <p:spPr>
-            <a:xfrm>
-              <a:off x="3708400" y="778252"/>
-              <a:ext cx="4775200" cy="4775200"/>
+            <a:xfrm flipV="1">
+              <a:off x="7036903" y="1334773"/>
+              <a:ext cx="608400" cy="608400"/>
             </a:xfrm>
-            <a:prstGeom prst="cloud">
+            <a:custGeom>
               <a:avLst/>
-            </a:prstGeom>
-            <a:gradFill flip="none" rotWithShape="1">
-              <a:gsLst>
-                <a:gs pos="0">
-                  <a:srgbClr val="77CFA3"/>
-                </a:gs>
-                <a:gs pos="74000">
-                  <a:srgbClr val="B4EEBE"/>
-                </a:gs>
-                <a:gs pos="83000">
-                  <a:srgbClr val="B3EFB3"/>
-                </a:gs>
-                <a:gs pos="100000">
-                  <a:srgbClr val="379E6B"/>
-                </a:gs>
-              </a:gsLst>
-              <a:lin ang="2700000" scaled="1"/>
-              <a:tileRect/>
-            </a:gradFill>
+              <a:gdLst>
+                <a:gd name="connsiteX0" fmla="*/ 0 w 608400"/>
+                <a:gd name="connsiteY0" fmla="*/ 0 h 608400"/>
+                <a:gd name="connsiteX1" fmla="*/ 608400 w 608400"/>
+                <a:gd name="connsiteY1" fmla="*/ 0 h 608400"/>
+                <a:gd name="connsiteX2" fmla="*/ 608400 w 608400"/>
+                <a:gd name="connsiteY2" fmla="*/ 608400 h 608400"/>
+                <a:gd name="connsiteX3" fmla="*/ 304806 w 608400"/>
+                <a:gd name="connsiteY3" fmla="*/ 608400 h 608400"/>
+                <a:gd name="connsiteX4" fmla="*/ 0 w 608400"/>
+                <a:gd name="connsiteY4" fmla="*/ 303594 h 608400"/>
+              </a:gdLst>
+              <a:ahLst/>
+              <a:cxnLst>
+                <a:cxn ang="0">
+                  <a:pos x="connsiteX0" y="connsiteY0"/>
+                </a:cxn>
+                <a:cxn ang="0">
+                  <a:pos x="connsiteX1" y="connsiteY1"/>
+                </a:cxn>
+                <a:cxn ang="0">
+                  <a:pos x="connsiteX2" y="connsiteY2"/>
+                </a:cxn>
+                <a:cxn ang="0">
+                  <a:pos x="connsiteX3" y="connsiteY3"/>
+                </a:cxn>
+                <a:cxn ang="0">
+                  <a:pos x="connsiteX4" y="connsiteY4"/>
+                </a:cxn>
+              </a:cxnLst>
+              <a:rect l="l" t="t" r="r" b="b"/>
+              <a:pathLst>
+                <a:path w="608400" h="608400">
+                  <a:moveTo>
+                    <a:pt x="0" y="0"/>
+                  </a:moveTo>
+                  <a:lnTo>
+                    <a:pt x="608400" y="0"/>
+                  </a:lnTo>
+                  <a:lnTo>
+                    <a:pt x="608400" y="608400"/>
+                  </a:lnTo>
+                  <a:lnTo>
+                    <a:pt x="304806" y="608400"/>
+                  </a:lnTo>
+                  <a:cubicBezTo>
+                    <a:pt x="136466" y="608400"/>
+                    <a:pt x="0" y="471934"/>
+                    <a:pt x="0" y="303594"/>
+                  </a:cubicBezTo>
+                  <a:close/>
+                </a:path>
+              </a:pathLst>
+            </a:custGeom>
+            <a:solidFill>
+              <a:srgbClr val="2B7D54"/>
+            </a:solidFill>
             <a:ln>
-              <a:solidFill>
-                <a:srgbClr val="99CB7B"/>
-              </a:solidFill>
+              <a:noFill/>
             </a:ln>
           </p:spPr>
           <p:style>
@@ -3257,45 +3974,342 @@
         </p:sp>
         <p:sp>
           <p:nvSpPr>
-            <p:cNvPr id="26" name="TextBox 25"/>
-            <p:cNvSpPr txBox="1"/>
+            <p:cNvPr id="221" name="자유형 220"/>
+            <p:cNvSpPr>
+              <a:spLocks noChangeAspect="1"/>
+            </p:cNvSpPr>
+            <p:nvPr/>
+          </p:nvSpPr>
+          <p:spPr>
+            <a:xfrm flipH="1" flipV="1">
+              <a:off x="8259103" y="1334773"/>
+              <a:ext cx="608400" cy="608400"/>
+            </a:xfrm>
+            <a:custGeom>
+              <a:avLst/>
+              <a:gdLst>
+                <a:gd name="connsiteX0" fmla="*/ 0 w 608400"/>
+                <a:gd name="connsiteY0" fmla="*/ 0 h 608400"/>
+                <a:gd name="connsiteX1" fmla="*/ 608400 w 608400"/>
+                <a:gd name="connsiteY1" fmla="*/ 0 h 608400"/>
+                <a:gd name="connsiteX2" fmla="*/ 608400 w 608400"/>
+                <a:gd name="connsiteY2" fmla="*/ 608400 h 608400"/>
+                <a:gd name="connsiteX3" fmla="*/ 304806 w 608400"/>
+                <a:gd name="connsiteY3" fmla="*/ 608400 h 608400"/>
+                <a:gd name="connsiteX4" fmla="*/ 0 w 608400"/>
+                <a:gd name="connsiteY4" fmla="*/ 303594 h 608400"/>
+              </a:gdLst>
+              <a:ahLst/>
+              <a:cxnLst>
+                <a:cxn ang="0">
+                  <a:pos x="connsiteX0" y="connsiteY0"/>
+                </a:cxn>
+                <a:cxn ang="0">
+                  <a:pos x="connsiteX1" y="connsiteY1"/>
+                </a:cxn>
+                <a:cxn ang="0">
+                  <a:pos x="connsiteX2" y="connsiteY2"/>
+                </a:cxn>
+                <a:cxn ang="0">
+                  <a:pos x="connsiteX3" y="connsiteY3"/>
+                </a:cxn>
+                <a:cxn ang="0">
+                  <a:pos x="connsiteX4" y="connsiteY4"/>
+                </a:cxn>
+              </a:cxnLst>
+              <a:rect l="l" t="t" r="r" b="b"/>
+              <a:pathLst>
+                <a:path w="608400" h="608400">
+                  <a:moveTo>
+                    <a:pt x="0" y="0"/>
+                  </a:moveTo>
+                  <a:lnTo>
+                    <a:pt x="608400" y="0"/>
+                  </a:lnTo>
+                  <a:lnTo>
+                    <a:pt x="608400" y="608400"/>
+                  </a:lnTo>
+                  <a:lnTo>
+                    <a:pt x="304806" y="608400"/>
+                  </a:lnTo>
+                  <a:cubicBezTo>
+                    <a:pt x="136466" y="608400"/>
+                    <a:pt x="0" y="471934"/>
+                    <a:pt x="0" y="303594"/>
+                  </a:cubicBezTo>
+                  <a:close/>
+                </a:path>
+              </a:pathLst>
+            </a:custGeom>
+            <a:solidFill>
+              <a:srgbClr val="52C28A"/>
+            </a:solidFill>
+            <a:ln>
+              <a:noFill/>
+            </a:ln>
+          </p:spPr>
+          <p:style>
+            <a:lnRef idx="2">
+              <a:schemeClr val="accent1">
+                <a:shade val="50000"/>
+              </a:schemeClr>
+            </a:lnRef>
+            <a:fillRef idx="1">
+              <a:schemeClr val="accent1"/>
+            </a:fillRef>
+            <a:effectRef idx="0">
+              <a:schemeClr val="accent1"/>
+            </a:effectRef>
+            <a:fontRef idx="minor">
+              <a:schemeClr val="lt1"/>
+            </a:fontRef>
+          </p:style>
+          <p:txBody>
+            <a:bodyPr rtlCol="0" anchor="ctr"/>
+            <a:lstStyle/>
+            <a:p>
+              <a:pPr algn="ctr"/>
+              <a:endParaRPr lang="ko-KR" altLang="en-US"/>
+            </a:p>
+          </p:txBody>
+        </p:sp>
+        <p:sp>
+          <p:nvSpPr>
+            <p:cNvPr id="222" name="직사각형 221"/>
+            <p:cNvSpPr>
+              <a:spLocks noChangeAspect="1"/>
+            </p:cNvSpPr>
             <p:nvPr/>
           </p:nvSpPr>
           <p:spPr>
             <a:xfrm>
-              <a:off x="4699000" y="942167"/>
-              <a:ext cx="2794000" cy="4447371"/>
+              <a:off x="8259103" y="1943173"/>
+              <a:ext cx="608400" cy="612000"/>
             </a:xfrm>
             <a:prstGeom prst="rect">
               <a:avLst/>
             </a:prstGeom>
-            <a:noFill/>
+            <a:solidFill>
+              <a:srgbClr val="369A68"/>
+            </a:solidFill>
+            <a:ln>
+              <a:noFill/>
+            </a:ln>
           </p:spPr>
+          <p:style>
+            <a:lnRef idx="2">
+              <a:schemeClr val="accent1">
+                <a:shade val="50000"/>
+              </a:schemeClr>
+            </a:lnRef>
+            <a:fillRef idx="1">
+              <a:schemeClr val="accent1"/>
+            </a:fillRef>
+            <a:effectRef idx="0">
+              <a:schemeClr val="accent1"/>
+            </a:effectRef>
+            <a:fontRef idx="minor">
+              <a:schemeClr val="lt1"/>
+            </a:fontRef>
+          </p:style>
           <p:txBody>
-            <a:bodyPr wrap="square" rtlCol="0">
-              <a:spAutoFit/>
-            </a:bodyPr>
+            <a:bodyPr rtlCol="0" anchor="ctr"/>
             <a:lstStyle/>
             <a:p>
               <a:pPr algn="ctr"/>
-              <a:r>
-                <a:rPr lang="en-US" altLang="ko-KR" sz="28300" b="1" smtClean="0">
-                  <a:solidFill>
-                    <a:srgbClr val="379E6B"/>
-                  </a:solidFill>
-                  <a:latin typeface="Segoe UI" panose="020B0502040204020203" pitchFamily="34" charset="0"/>
-                  <a:ea typeface="Segoe UI Black" panose="020B0A02040204020203" pitchFamily="34" charset="0"/>
-                  <a:cs typeface="Segoe UI" panose="020B0502040204020203" pitchFamily="34" charset="0"/>
-                </a:rPr>
-                <a:t>M</a:t>
-              </a:r>
-              <a:endParaRPr lang="ko-KR" altLang="en-US" sz="28300" b="1">
-                <a:solidFill>
-                  <a:srgbClr val="379E6B"/>
-                </a:solidFill>
-                <a:latin typeface="Segoe UI" panose="020B0502040204020203" pitchFamily="34" charset="0"/>
-                <a:cs typeface="Segoe UI" panose="020B0502040204020203" pitchFamily="34" charset="0"/>
-              </a:endParaRPr>
+              <a:endParaRPr lang="ko-KR" altLang="en-US"/>
+            </a:p>
+          </p:txBody>
+        </p:sp>
+        <p:sp>
+          <p:nvSpPr>
+            <p:cNvPr id="223" name="직사각형 222"/>
+            <p:cNvSpPr>
+              <a:spLocks noChangeAspect="1"/>
+            </p:cNvSpPr>
+            <p:nvPr/>
+          </p:nvSpPr>
+          <p:spPr>
+            <a:xfrm>
+              <a:off x="7036903" y="1943173"/>
+              <a:ext cx="608400" cy="612000"/>
+            </a:xfrm>
+            <a:prstGeom prst="rect">
+              <a:avLst/>
+            </a:prstGeom>
+            <a:solidFill>
+              <a:srgbClr val="369A68"/>
+            </a:solidFill>
+            <a:ln>
+              <a:noFill/>
+            </a:ln>
+          </p:spPr>
+          <p:style>
+            <a:lnRef idx="2">
+              <a:schemeClr val="accent1">
+                <a:shade val="50000"/>
+              </a:schemeClr>
+            </a:lnRef>
+            <a:fillRef idx="1">
+              <a:schemeClr val="accent1"/>
+            </a:fillRef>
+            <a:effectRef idx="0">
+              <a:schemeClr val="accent1"/>
+            </a:effectRef>
+            <a:fontRef idx="minor">
+              <a:schemeClr val="lt1"/>
+            </a:fontRef>
+          </p:style>
+          <p:txBody>
+            <a:bodyPr rtlCol="0" anchor="ctr"/>
+            <a:lstStyle/>
+            <a:p>
+              <a:pPr algn="ctr"/>
+              <a:endParaRPr lang="ko-KR" altLang="en-US"/>
+            </a:p>
+          </p:txBody>
+        </p:sp>
+        <p:sp>
+          <p:nvSpPr>
+            <p:cNvPr id="224" name="직사각형 223"/>
+            <p:cNvSpPr>
+              <a:spLocks noChangeAspect="1"/>
+            </p:cNvSpPr>
+            <p:nvPr/>
+          </p:nvSpPr>
+          <p:spPr>
+            <a:xfrm>
+              <a:off x="7647103" y="1943173"/>
+              <a:ext cx="612000" cy="612000"/>
+            </a:xfrm>
+            <a:prstGeom prst="rect">
+              <a:avLst/>
+            </a:prstGeom>
+            <a:solidFill>
+              <a:srgbClr val="AFE3C9"/>
+            </a:solidFill>
+            <a:ln>
+              <a:noFill/>
+            </a:ln>
+          </p:spPr>
+          <p:style>
+            <a:lnRef idx="2">
+              <a:schemeClr val="accent1">
+                <a:shade val="50000"/>
+              </a:schemeClr>
+            </a:lnRef>
+            <a:fillRef idx="1">
+              <a:schemeClr val="accent1"/>
+            </a:fillRef>
+            <a:effectRef idx="0">
+              <a:schemeClr val="accent1"/>
+            </a:effectRef>
+            <a:fontRef idx="minor">
+              <a:schemeClr val="lt1"/>
+            </a:fontRef>
+          </p:style>
+          <p:txBody>
+            <a:bodyPr rtlCol="0" anchor="ctr"/>
+            <a:lstStyle/>
+            <a:p>
+              <a:pPr algn="ctr"/>
+              <a:endParaRPr lang="ko-KR" altLang="en-US"/>
+            </a:p>
+          </p:txBody>
+        </p:sp>
+        <p:sp>
+          <p:nvSpPr>
+            <p:cNvPr id="225" name="직사각형 224"/>
+            <p:cNvSpPr>
+              <a:spLocks noChangeAspect="1"/>
+            </p:cNvSpPr>
+            <p:nvPr/>
+          </p:nvSpPr>
+          <p:spPr>
+            <a:xfrm>
+              <a:off x="7647103" y="1334773"/>
+              <a:ext cx="612000" cy="608400"/>
+            </a:xfrm>
+            <a:prstGeom prst="rect">
+              <a:avLst/>
+            </a:prstGeom>
+            <a:solidFill>
+              <a:srgbClr val="369A68"/>
+            </a:solidFill>
+            <a:ln>
+              <a:noFill/>
+            </a:ln>
+          </p:spPr>
+          <p:style>
+            <a:lnRef idx="2">
+              <a:schemeClr val="accent1">
+                <a:shade val="50000"/>
+              </a:schemeClr>
+            </a:lnRef>
+            <a:fillRef idx="1">
+              <a:schemeClr val="accent1"/>
+            </a:fillRef>
+            <a:effectRef idx="0">
+              <a:schemeClr val="accent1"/>
+            </a:effectRef>
+            <a:fontRef idx="minor">
+              <a:schemeClr val="lt1"/>
+            </a:fontRef>
+          </p:style>
+          <p:txBody>
+            <a:bodyPr rtlCol="0" anchor="ctr"/>
+            <a:lstStyle/>
+            <a:p>
+              <a:pPr algn="ctr"/>
+              <a:endParaRPr lang="ko-KR" altLang="en-US"/>
+            </a:p>
+          </p:txBody>
+        </p:sp>
+        <p:sp>
+          <p:nvSpPr>
+            <p:cNvPr id="226" name="직사각형 225"/>
+            <p:cNvSpPr>
+              <a:spLocks noChangeAspect="1"/>
+            </p:cNvSpPr>
+            <p:nvPr/>
+          </p:nvSpPr>
+          <p:spPr>
+            <a:xfrm>
+              <a:off x="7647103" y="2555173"/>
+              <a:ext cx="612000" cy="608400"/>
+            </a:xfrm>
+            <a:prstGeom prst="rect">
+              <a:avLst/>
+            </a:prstGeom>
+            <a:solidFill>
+              <a:srgbClr val="369A68"/>
+            </a:solidFill>
+            <a:ln>
+              <a:noFill/>
+            </a:ln>
+          </p:spPr>
+          <p:style>
+            <a:lnRef idx="2">
+              <a:schemeClr val="accent1">
+                <a:shade val="50000"/>
+              </a:schemeClr>
+            </a:lnRef>
+            <a:fillRef idx="1">
+              <a:schemeClr val="accent1"/>
+            </a:fillRef>
+            <a:effectRef idx="0">
+              <a:schemeClr val="accent1"/>
+            </a:effectRef>
+            <a:fontRef idx="minor">
+              <a:schemeClr val="lt1"/>
+            </a:fontRef>
+          </p:style>
+          <p:txBody>
+            <a:bodyPr rtlCol="0" anchor="ctr"/>
+            <a:lstStyle/>
+            <a:p>
+              <a:pPr algn="ctr"/>
+              <a:endParaRPr lang="ko-KR" altLang="en-US"/>
             </a:p>
           </p:txBody>
         </p:sp>

--- a/icons/icon-vector.pptx
+++ b/icons/icon-vector.pptx
@@ -2977,7 +2977,7 @@
         </p:nvSpPr>
         <p:spPr>
           <a:xfrm>
-            <a:off x="3660503" y="1245873"/>
+            <a:off x="1993544" y="881731"/>
             <a:ext cx="1828800" cy="1828800"/>
           </a:xfrm>
           <a:prstGeom prst="roundRect">
@@ -2995,7 +2995,7 @@
               <a:rot lat="0" lon="0" rev="10800000"/>
             </a:lightRig>
           </a:scene3d>
-          <a:sp3d extrusionH="762000" prstMaterial="matte">
+          <a:sp3d extrusionH="1524000" prstMaterial="matte">
             <a:extrusionClr>
               <a:srgbClr val="349E6C"/>
             </a:extrusionClr>
@@ -3037,7 +3037,7 @@
         </p:nvSpPr>
         <p:spPr>
           <a:xfrm>
-            <a:off x="3658703" y="2466273"/>
+            <a:off x="1991744" y="2102131"/>
             <a:ext cx="608400" cy="608400"/>
           </a:xfrm>
           <a:custGeom>
@@ -3136,7 +3136,7 @@
         </p:nvSpPr>
         <p:spPr>
           <a:xfrm flipH="1">
-            <a:off x="4880903" y="2466273"/>
+            <a:off x="3213944" y="2102131"/>
             <a:ext cx="608400" cy="608400"/>
           </a:xfrm>
           <a:custGeom>
@@ -3235,7 +3235,7 @@
         </p:nvSpPr>
         <p:spPr>
           <a:xfrm flipV="1">
-            <a:off x="3658703" y="1245873"/>
+            <a:off x="1991744" y="881731"/>
             <a:ext cx="608400" cy="608400"/>
           </a:xfrm>
           <a:custGeom>
@@ -3334,7 +3334,7 @@
         </p:nvSpPr>
         <p:spPr>
           <a:xfrm flipH="1" flipV="1">
-            <a:off x="4880903" y="1245873"/>
+            <a:off x="3213944" y="881731"/>
             <a:ext cx="608400" cy="608400"/>
           </a:xfrm>
           <a:custGeom>
@@ -3433,7 +3433,7 @@
         </p:nvSpPr>
         <p:spPr>
           <a:xfrm>
-            <a:off x="4880903" y="1854273"/>
+            <a:off x="3213944" y="1490131"/>
             <a:ext cx="608400" cy="612000"/>
           </a:xfrm>
           <a:prstGeom prst="rect">
@@ -3479,7 +3479,7 @@
         </p:nvSpPr>
         <p:spPr>
           <a:xfrm>
-            <a:off x="3658703" y="1854273"/>
+            <a:off x="1991744" y="1490131"/>
             <a:ext cx="608400" cy="612000"/>
           </a:xfrm>
           <a:prstGeom prst="rect">
@@ -3525,7 +3525,7 @@
         </p:nvSpPr>
         <p:spPr>
           <a:xfrm>
-            <a:off x="4268903" y="1854273"/>
+            <a:off x="2601944" y="1490131"/>
             <a:ext cx="612000" cy="612000"/>
           </a:xfrm>
           <a:prstGeom prst="rect">
@@ -3571,7 +3571,7 @@
         </p:nvSpPr>
         <p:spPr>
           <a:xfrm>
-            <a:off x="4268903" y="1245873"/>
+            <a:off x="2601944" y="881731"/>
             <a:ext cx="612000" cy="608400"/>
           </a:xfrm>
           <a:prstGeom prst="rect">
@@ -3617,7 +3617,7 @@
         </p:nvSpPr>
         <p:spPr>
           <a:xfrm>
-            <a:off x="4268903" y="2466273"/>
+            <a:off x="2601944" y="2102131"/>
             <a:ext cx="612000" cy="608400"/>
           </a:xfrm>
           <a:prstGeom prst="rect">
